--- a/prezentacio/ProParking_Prezentacio.pptx
+++ b/prezentacio/ProParking_Prezentacio.pptx
@@ -5,17 +5,18 @@
     <p:sldMasterId id="2147483648" r:id="rId1"/>
   </p:sldMasterIdLst>
   <p:notesMasterIdLst>
-    <p:notesMasterId r:id="rId10"/>
+    <p:notesMasterId r:id="rId11"/>
   </p:notesMasterIdLst>
   <p:sldIdLst>
     <p:sldId id="256" r:id="rId2"/>
     <p:sldId id="257" r:id="rId3"/>
     <p:sldId id="259" r:id="rId4"/>
-    <p:sldId id="262" r:id="rId5"/>
-    <p:sldId id="269" r:id="rId6"/>
-    <p:sldId id="261" r:id="rId7"/>
-    <p:sldId id="268" r:id="rId8"/>
-    <p:sldId id="266" r:id="rId9"/>
+    <p:sldId id="270" r:id="rId5"/>
+    <p:sldId id="262" r:id="rId6"/>
+    <p:sldId id="269" r:id="rId7"/>
+    <p:sldId id="261" r:id="rId8"/>
+    <p:sldId id="268" r:id="rId9"/>
+    <p:sldId id="266" r:id="rId10"/>
   </p:sldIdLst>
   <p:sldSz cx="9144000" cy="5143500" type="screen16x9"/>
   <p:notesSz cx="5143500" cy="9144000"/>
@@ -589,7 +590,7 @@
           <a:p>
             <a:fld id="{F7021451-1387-4CA6-816F-3879F97B5CBC}" type="slidenum">
               <a:rPr lang="en-US"/>
-              <a:t>4</a:t>
+              <a:t>5</a:t>
             </a:fld>
             <a:endParaRPr lang="en-US"/>
           </a:p>
@@ -680,7 +681,7 @@
           <a:p>
             <a:fld id="{F7021451-1387-4CA6-816F-3879F97B5CBC}" type="slidenum">
               <a:rPr lang="en-US"/>
-              <a:t>6</a:t>
+              <a:t>7</a:t>
             </a:fld>
             <a:endParaRPr lang="en-US"/>
           </a:p>
@@ -795,7 +796,7 @@
           <a:p>
             <a:fld id="{F7021451-1387-4CA6-816F-3879F97B5CBC}" type="slidenum">
               <a:rPr lang="en-US"/>
-              <a:t>7</a:t>
+              <a:t>8</a:t>
             </a:fld>
             <a:endParaRPr lang="en-US"/>
           </a:p>
@@ -886,7 +887,7 @@
           <a:p>
             <a:fld id="{F7021451-1387-4CA6-816F-3879F97B5CBC}" type="slidenum">
               <a:rPr lang="en-US"/>
-              <a:t>8</a:t>
+              <a:t>9</a:t>
             </a:fld>
             <a:endParaRPr lang="en-US"/>
           </a:p>
@@ -2837,6 +2838,17 @@
               <a:buNone/>
             </a:pPr>
             <a:r>
+              <a:rPr lang="en-US" sz="3600" b="1" dirty="0" err="1">
+                <a:solidFill>
+                  <a:srgbClr val="FFFFFF"/>
+                </a:solidFill>
+                <a:latin typeface="Arial Black" pitchFamily="34" charset="0"/>
+                <a:ea typeface="Arial Black" pitchFamily="34" charset="-122"/>
+                <a:cs typeface="Arial Black" pitchFamily="34" charset="-120"/>
+              </a:rPr>
+              <a:t>Felhasznált</a:t>
+            </a:r>
+            <a:r>
               <a:rPr lang="en-US" sz="3600" b="1" dirty="0">
                 <a:solidFill>
                   <a:srgbClr val="FFFFFF"/>
@@ -2845,7 +2857,18 @@
                 <a:ea typeface="Arial Black" pitchFamily="34" charset="-122"/>
                 <a:cs typeface="Arial Black" pitchFamily="34" charset="-120"/>
               </a:rPr>
-              <a:t>Felhasznált Technológiák</a:t>
+              <a:t> </a:t>
+            </a:r>
+            <a:r>
+              <a:rPr lang="hu-HU" sz="3600" b="1" dirty="0">
+                <a:solidFill>
+                  <a:srgbClr val="FFFFFF"/>
+                </a:solidFill>
+                <a:latin typeface="Arial Black" pitchFamily="34" charset="0"/>
+                <a:ea typeface="Arial Black" pitchFamily="34" charset="-122"/>
+                <a:cs typeface="Arial Black" pitchFamily="34" charset="-120"/>
+              </a:rPr>
+              <a:t>Programnyelvek</a:t>
             </a:r>
             <a:endParaRPr lang="en-US" sz="3600" dirty="0"/>
           </a:p>
@@ -3905,6 +3928,241 @@
 </file>
 
 <file path=ppt/slides/slide4.xml><?xml version="1.0" encoding="utf-8"?>
+<p:sld xmlns:a="http://schemas.openxmlformats.org/drawingml/2006/main" xmlns:r="http://schemas.openxmlformats.org/officeDocument/2006/relationships" xmlns:p="http://schemas.openxmlformats.org/presentationml/2006/main">
+  <p:cSld>
+    <p:spTree>
+      <p:nvGrpSpPr>
+        <p:cNvPr id="1" name=""/>
+        <p:cNvGrpSpPr/>
+        <p:nvPr/>
+      </p:nvGrpSpPr>
+      <p:grpSpPr>
+        <a:xfrm>
+          <a:off x="0" y="0"/>
+          <a:ext cx="0" cy="0"/>
+          <a:chOff x="0" y="0"/>
+          <a:chExt cx="0" cy="0"/>
+        </a:xfrm>
+      </p:grpSpPr>
+      <p:sp>
+        <p:nvSpPr>
+          <p:cNvPr id="2" name="Szövegdoboz 1">
+            <a:extLst>
+              <a:ext uri="{FF2B5EF4-FFF2-40B4-BE49-F238E27FC236}">
+                <a16:creationId xmlns:a16="http://schemas.microsoft.com/office/drawing/2014/main" id="{FDE580C6-106C-4714-88B5-B64DA6AECE57}"/>
+              </a:ext>
+            </a:extLst>
+          </p:cNvPr>
+          <p:cNvSpPr txBox="1"/>
+          <p:nvPr/>
+        </p:nvSpPr>
+        <p:spPr>
+          <a:xfrm>
+            <a:off x="3873500" y="2197100"/>
+            <a:ext cx="4650953" cy="2308324"/>
+          </a:xfrm>
+          <a:prstGeom prst="rect">
+            <a:avLst/>
+          </a:prstGeom>
+          <a:noFill/>
+        </p:spPr>
+        <p:txBody>
+          <a:bodyPr wrap="none" rtlCol="0">
+            <a:spAutoFit/>
+          </a:bodyPr>
+          <a:lstStyle/>
+          <a:p>
+            <a:r>
+              <a:rPr lang="hu-HU" dirty="0"/>
+              <a:t>Angolul elején</a:t>
+            </a:r>
+          </a:p>
+          <a:p>
+            <a:r>
+              <a:rPr lang="hu-HU" dirty="0"/>
+              <a:t>Helyesírás</a:t>
+            </a:r>
+          </a:p>
+          <a:p>
+            <a:r>
+              <a:rPr lang="hu-HU" dirty="0"/>
+              <a:t>Másik ikon</a:t>
+            </a:r>
+          </a:p>
+          <a:p>
+            <a:r>
+              <a:rPr lang="hu-HU" dirty="0"/>
+              <a:t>Hardver</a:t>
+            </a:r>
+          </a:p>
+          <a:p>
+            <a:r>
+              <a:rPr lang="hu-HU" dirty="0"/>
+              <a:t>3D nyomtatás – modellezés </a:t>
+            </a:r>
+            <a:r>
+              <a:rPr lang="hu-HU" dirty="0" err="1"/>
+              <a:t>TinkerCad</a:t>
+            </a:r>
+            <a:r>
+              <a:rPr lang="hu-HU" dirty="0"/>
+              <a:t>, Shapr3D</a:t>
+            </a:r>
+          </a:p>
+          <a:p>
+            <a:r>
+              <a:rPr lang="hu-HU" dirty="0"/>
+              <a:t>Neveink a végén</a:t>
+            </a:r>
+          </a:p>
+          <a:p>
+            <a:r>
+              <a:rPr lang="hu-HU" dirty="0"/>
+              <a:t>Képek a végén magunkról, weboldalról</a:t>
+            </a:r>
+            <a:r>
+              <a:rPr lang="hu-HU"/>
+              <a:t>, </a:t>
+            </a:r>
+          </a:p>
+          <a:p>
+            <a:r>
+              <a:rPr lang="hu-HU"/>
+              <a:t>hardverről </a:t>
+            </a:r>
+            <a:r>
+              <a:rPr lang="hu-HU" dirty="0"/>
+              <a:t>és kisautóról</a:t>
+            </a:r>
+          </a:p>
+        </p:txBody>
+      </p:sp>
+      <p:sp>
+        <p:nvSpPr>
+          <p:cNvPr id="3" name="Szövegdoboz 2">
+            <a:extLst>
+              <a:ext uri="{FF2B5EF4-FFF2-40B4-BE49-F238E27FC236}">
+                <a16:creationId xmlns:a16="http://schemas.microsoft.com/office/drawing/2014/main" id="{9D81EE05-2B6C-48FA-BF7B-48FA8502F41A}"/>
+              </a:ext>
+            </a:extLst>
+          </p:cNvPr>
+          <p:cNvSpPr txBox="1"/>
+          <p:nvPr/>
+        </p:nvSpPr>
+        <p:spPr>
+          <a:xfrm>
+            <a:off x="228600" y="1098550"/>
+            <a:ext cx="3740576" cy="3693319"/>
+          </a:xfrm>
+          <a:prstGeom prst="rect">
+            <a:avLst/>
+          </a:prstGeom>
+          <a:noFill/>
+        </p:spPr>
+        <p:txBody>
+          <a:bodyPr wrap="none" rtlCol="0">
+            <a:spAutoFit/>
+          </a:bodyPr>
+          <a:lstStyle/>
+          <a:p>
+            <a:r>
+              <a:rPr lang="hu-HU" dirty="0"/>
+              <a:t>Sorrend:</a:t>
+            </a:r>
+          </a:p>
+          <a:p>
+            <a:r>
+              <a:rPr lang="hu-HU" dirty="0"/>
+              <a:t>Bevezetés – fő oldal, </a:t>
+            </a:r>
+            <a:r>
+              <a:rPr lang="hu-HU" dirty="0" err="1"/>
+              <a:t>weiss.proparking</a:t>
+            </a:r>
+            <a:endParaRPr lang="hu-HU" dirty="0"/>
+          </a:p>
+          <a:p>
+            <a:r>
+              <a:rPr lang="hu-HU" dirty="0"/>
+              <a:t>Adatbázis</a:t>
+            </a:r>
+          </a:p>
+          <a:p>
+            <a:r>
+              <a:rPr lang="hu-HU" dirty="0"/>
+              <a:t>Főoldal – </a:t>
+            </a:r>
+            <a:r>
+              <a:rPr lang="hu-HU" dirty="0" err="1"/>
+              <a:t>demo</a:t>
+            </a:r>
+            <a:endParaRPr lang="hu-HU" dirty="0"/>
+          </a:p>
+          <a:p>
+            <a:r>
+              <a:rPr lang="hu-HU" dirty="0" err="1"/>
+              <a:t>Apiról</a:t>
+            </a:r>
+            <a:r>
+              <a:rPr lang="hu-HU" dirty="0"/>
+              <a:t> pár mondat</a:t>
+            </a:r>
+          </a:p>
+          <a:p>
+            <a:endParaRPr lang="hu-HU" dirty="0"/>
+          </a:p>
+          <a:p>
+            <a:r>
+              <a:rPr lang="hu-HU" dirty="0"/>
+              <a:t>Végére:</a:t>
+            </a:r>
+          </a:p>
+          <a:p>
+            <a:r>
+              <a:rPr lang="hu-HU" dirty="0"/>
+              <a:t>Mi valósult meg</a:t>
+            </a:r>
+          </a:p>
+          <a:p>
+            <a:r>
+              <a:rPr lang="hu-HU" dirty="0"/>
+              <a:t>Jövőbeli tervek</a:t>
+            </a:r>
+          </a:p>
+          <a:p>
+            <a:r>
+              <a:rPr lang="hu-HU" dirty="0"/>
+              <a:t>Tapasztalat – mit tanultunk</a:t>
+            </a:r>
+          </a:p>
+          <a:p>
+            <a:r>
+              <a:rPr lang="hu-HU" dirty="0"/>
+              <a:t>Mi volt nehéz</a:t>
+            </a:r>
+          </a:p>
+          <a:p>
+            <a:endParaRPr lang="hu-HU" dirty="0"/>
+          </a:p>
+          <a:p>
+            <a:endParaRPr lang="hu-HU" dirty="0"/>
+          </a:p>
+        </p:txBody>
+      </p:sp>
+    </p:spTree>
+    <p:extLst>
+      <p:ext uri="{BB962C8B-B14F-4D97-AF65-F5344CB8AC3E}">
+        <p14:creationId xmlns:p14="http://schemas.microsoft.com/office/powerpoint/2010/main" val="3453868638"/>
+      </p:ext>
+    </p:extLst>
+  </p:cSld>
+  <p:clrMapOvr>
+    <a:masterClrMapping/>
+  </p:clrMapOvr>
+</p:sld>
+</file>
+
+<file path=ppt/slides/slide5.xml><?xml version="1.0" encoding="utf-8"?>
 <p:sld xmlns:a="http://schemas.openxmlformats.org/drawingml/2006/main" xmlns:r="http://schemas.openxmlformats.org/officeDocument/2006/relationships" xmlns:p="http://schemas.openxmlformats.org/presentationml/2006/main">
   <p:cSld name="Slide 7">
     <p:bg>
@@ -4345,6 +4603,17 @@
               <a:buNone/>
             </a:pPr>
             <a:r>
+              <a:rPr lang="hu-HU" sz="1000" dirty="0">
+                <a:solidFill>
+                  <a:srgbClr val="94A3B8"/>
+                </a:solidFill>
+                <a:latin typeface="Calibri" pitchFamily="34" charset="0"/>
+                <a:ea typeface="Calibri" pitchFamily="34" charset="-122"/>
+                <a:cs typeface="Calibri" pitchFamily="34" charset="-120"/>
+              </a:rPr>
+              <a:t>Szerepkör alapú</a:t>
+            </a:r>
+            <a:r>
               <a:rPr lang="en-US" sz="1000" dirty="0">
                 <a:solidFill>
                   <a:srgbClr val="94A3B8"/>
@@ -4353,7 +4622,18 @@
                 <a:ea typeface="Calibri" pitchFamily="34" charset="-122"/>
                 <a:cs typeface="Calibri" pitchFamily="34" charset="-120"/>
               </a:rPr>
-              <a:t>Role-based hozzáférés</a:t>
+              <a:t> </a:t>
+            </a:r>
+            <a:r>
+              <a:rPr lang="en-US" sz="1000" dirty="0" err="1">
+                <a:solidFill>
+                  <a:srgbClr val="94A3B8"/>
+                </a:solidFill>
+                <a:latin typeface="Calibri" pitchFamily="34" charset="0"/>
+                <a:ea typeface="Calibri" pitchFamily="34" charset="-122"/>
+                <a:cs typeface="Calibri" pitchFamily="34" charset="-120"/>
+              </a:rPr>
+              <a:t>hozzáférés</a:t>
             </a:r>
             <a:endParaRPr lang="en-US" sz="1000" dirty="0"/>
           </a:p>
@@ -4874,6 +5154,17 @@
               <a:buNone/>
             </a:pPr>
             <a:r>
+              <a:rPr lang="en-US" sz="1300" b="1" dirty="0" err="1">
+                <a:solidFill>
+                  <a:srgbClr val="FFFFFF"/>
+                </a:solidFill>
+                <a:latin typeface="Arial Black" pitchFamily="34" charset="0"/>
+                <a:ea typeface="Arial Black" pitchFamily="34" charset="-122"/>
+                <a:cs typeface="Arial Black" pitchFamily="34" charset="-120"/>
+              </a:rPr>
+              <a:t>Foglalás</a:t>
+            </a:r>
+            <a:r>
               <a:rPr lang="en-US" sz="1300" b="1" dirty="0">
                 <a:solidFill>
                   <a:srgbClr val="FFFFFF"/>
@@ -4882,7 +5173,18 @@
                 <a:ea typeface="Arial Black" pitchFamily="34" charset="-122"/>
                 <a:cs typeface="Arial Black" pitchFamily="34" charset="-120"/>
               </a:rPr>
-              <a:t>Foglalás &amp; Fizetés</a:t>
+              <a:t> &amp; </a:t>
+            </a:r>
+            <a:r>
+              <a:rPr lang="en-US" sz="1300" b="1" dirty="0" err="1">
+                <a:solidFill>
+                  <a:srgbClr val="FFFFFF"/>
+                </a:solidFill>
+                <a:latin typeface="Arial Black" pitchFamily="34" charset="0"/>
+                <a:ea typeface="Arial Black" pitchFamily="34" charset="-122"/>
+                <a:cs typeface="Arial Black" pitchFamily="34" charset="-120"/>
+              </a:rPr>
+              <a:t>Fizetés</a:t>
             </a:r>
             <a:endParaRPr lang="en-US" sz="1300" dirty="0"/>
           </a:p>
@@ -5359,6 +5661,17 @@
               <a:buNone/>
             </a:pPr>
             <a:r>
+              <a:rPr lang="hu-HU" sz="1000" dirty="0">
+                <a:solidFill>
+                  <a:srgbClr val="94A3B8"/>
+                </a:solidFill>
+                <a:latin typeface="Calibri" pitchFamily="34" charset="0"/>
+                <a:ea typeface="Calibri" pitchFamily="34" charset="-122"/>
+                <a:cs typeface="Calibri" pitchFamily="34" charset="-120"/>
+              </a:rPr>
+              <a:t>Parkolási</a:t>
+            </a:r>
+            <a:r>
               <a:rPr lang="en-US" sz="1000" dirty="0">
                 <a:solidFill>
                   <a:srgbClr val="94A3B8"/>
@@ -5367,7 +5680,7 @@
                 <a:ea typeface="Calibri" pitchFamily="34" charset="-122"/>
                 <a:cs typeface="Calibri" pitchFamily="34" charset="-120"/>
               </a:rPr>
-              <a:t>Bevételi statisztikák</a:t>
+              <a:t> statisztikák</a:t>
             </a:r>
             <a:endParaRPr lang="en-US" sz="1000" dirty="0"/>
           </a:p>
@@ -5421,17 +5734,6 @@
             <a:pPr marL="0" indent="0">
               <a:buNone/>
             </a:pPr>
-            <a:r>
-              <a:rPr lang="en-US" sz="1000" dirty="0">
-                <a:solidFill>
-                  <a:srgbClr val="94A3B8"/>
-                </a:solidFill>
-                <a:latin typeface="Calibri" pitchFamily="34" charset="0"/>
-                <a:ea typeface="Calibri" pitchFamily="34" charset="-122"/>
-                <a:cs typeface="Calibri" pitchFamily="34" charset="-120"/>
-              </a:rPr>
-              <a:t>Parkolók hozzáadása/szerkesztése</a:t>
-            </a:r>
             <a:endParaRPr lang="en-US" sz="1000" dirty="0"/>
           </a:p>
         </p:txBody>
@@ -5444,7 +5746,7 @@
 </p:sld>
 </file>
 
-<file path=ppt/slides/slide5.xml><?xml version="1.0" encoding="utf-8"?>
+<file path=ppt/slides/slide6.xml><?xml version="1.0" encoding="utf-8"?>
 <p:sld xmlns:a="http://schemas.openxmlformats.org/drawingml/2006/main" xmlns:r="http://schemas.openxmlformats.org/officeDocument/2006/relationships" xmlns:p="http://schemas.openxmlformats.org/presentationml/2006/main">
   <p:cSld>
     <p:bg>
@@ -5537,7 +5839,7 @@
                 </a:solidFill>
                 <a:latin typeface="Arial Black" pitchFamily="34" charset="0"/>
               </a:rPr>
-              <a:t>Adatbázisunk teljes szerkezete</a:t>
+              <a:t>Adatbázis teljes szerkezete</a:t>
             </a:r>
             <a:endParaRPr lang="en-US" sz="3600" dirty="0"/>
           </a:p>
@@ -5594,7 +5896,7 @@
 </p:sld>
 </file>
 
-<file path=ppt/slides/slide6.xml><?xml version="1.0" encoding="utf-8"?>
+<file path=ppt/slides/slide7.xml><?xml version="1.0" encoding="utf-8"?>
 <p:sld xmlns:a="http://schemas.openxmlformats.org/drawingml/2006/main" xmlns:r="http://schemas.openxmlformats.org/officeDocument/2006/relationships" xmlns:p="http://schemas.openxmlformats.org/presentationml/2006/main">
   <p:cSld name="Slide 6">
     <p:bg>
@@ -7470,7 +7772,7 @@
 </p:sld>
 </file>
 
-<file path=ppt/slides/slide7.xml><?xml version="1.0" encoding="utf-8"?>
+<file path=ppt/slides/slide8.xml><?xml version="1.0" encoding="utf-8"?>
 <p:sld xmlns:a="http://schemas.openxmlformats.org/drawingml/2006/main" xmlns:r="http://schemas.openxmlformats.org/officeDocument/2006/relationships" xmlns:p="http://schemas.openxmlformats.org/presentationml/2006/main">
   <p:cSld>
     <p:bg>
@@ -7620,7 +7922,7 @@
             <a:off x="235744" y="868680"/>
             <a:ext cx="8243431" cy="3900487"/>
           </a:xfrm>
-          <a:prstGeom prst="snip2DiagRect">
+          <a:prstGeom prst="rect">
             <a:avLst/>
           </a:prstGeom>
           <a:solidFill>
@@ -7628,16 +7930,16 @@
               <a:shade val="85000"/>
             </a:srgbClr>
           </a:solidFill>
-          <a:ln w="88900" cap="sq">
+          <a:ln w="57150" cap="sq">
             <a:solidFill>
               <a:srgbClr val="FFFFFF"/>
             </a:solidFill>
             <a:miter lim="800000"/>
           </a:ln>
           <a:effectLst>
-            <a:outerShdw blurRad="88900" algn="tl" rotWithShape="0">
+            <a:outerShdw blurRad="55000" dist="18000" dir="5400000" algn="tl" rotWithShape="0">
               <a:srgbClr val="000000">
-                <a:alpha val="45000"/>
+                <a:alpha val="40000"/>
               </a:srgbClr>
             </a:outerShdw>
           </a:effectLst>
@@ -7668,7 +7970,7 @@
 </p:sld>
 </file>
 
-<file path=ppt/slides/slide8.xml><?xml version="1.0" encoding="utf-8"?>
+<file path=ppt/slides/slide9.xml><?xml version="1.0" encoding="utf-8"?>
 <p:sld xmlns:a="http://schemas.openxmlformats.org/drawingml/2006/main" xmlns:r="http://schemas.openxmlformats.org/officeDocument/2006/relationships" xmlns:p="http://schemas.openxmlformats.org/presentationml/2006/main">
   <p:cSld name="Slide 11">
     <p:bg>
